--- a/pitch/Kintrace-deck.pptx
+++ b/pitch/Kintrace-deck.pptx
@@ -5352,7 +5352,23 @@
                 </a:solidFill>
                 <a:latin typeface="Georgia"/>
               </a:rPr>
-              <a:t>$200 a robot a month, against a technician visit that costs $1,500 to $3,000.</a:t>
+              <a:t>$200 a robot a month, against a technician visit</a:t>
+            </a:r>
+          </a:p>
+          <a:p>
+            <a:pPr algn="l">
+              <a:lnSpc>
+                <a:spcPct val="116000"/>
+              </a:lnSpc>
+            </a:pPr>
+            <a:r>
+              <a:rPr sz="2900" b="0">
+                <a:solidFill>
+                  <a:srgbClr val="0C0C0E"/>
+                </a:solidFill>
+                <a:latin typeface="Georgia"/>
+              </a:rPr>
+              <a:t>that costs $1,500 to $3,000.</a:t>
             </a:r>
           </a:p>
         </p:txBody>
@@ -5404,7 +5420,7 @@
         </p:nvSpPr>
         <p:spPr>
           <a:xfrm>
-            <a:off x="777240" y="2139696"/>
+            <a:off x="777240" y="2103120"/>
             <a:ext cx="4114800" cy="347472"/>
           </a:xfrm>
           <a:prstGeom prst="rect">
@@ -5443,7 +5459,7 @@
         </p:nvSpPr>
         <p:spPr>
           <a:xfrm>
-            <a:off x="777240" y="2487168"/>
+            <a:off x="777240" y="2450592"/>
             <a:ext cx="3703320" cy="548640"/>
           </a:xfrm>
           <a:prstGeom prst="rect">
@@ -5482,7 +5498,7 @@
         </p:nvSpPr>
         <p:spPr>
           <a:xfrm>
-            <a:off x="777240" y="3127248"/>
+            <a:off x="777240" y="2999232"/>
             <a:ext cx="4114800" cy="347472"/>
           </a:xfrm>
           <a:prstGeom prst="rect">
@@ -5521,7 +5537,7 @@
         </p:nvSpPr>
         <p:spPr>
           <a:xfrm>
-            <a:off x="777240" y="3474720"/>
+            <a:off x="777240" y="3346704"/>
             <a:ext cx="3703320" cy="548640"/>
           </a:xfrm>
           <a:prstGeom prst="rect">
@@ -5560,7 +5576,7 @@
         </p:nvSpPr>
         <p:spPr>
           <a:xfrm>
-            <a:off x="777240" y="4114800"/>
+            <a:off x="777240" y="3895344"/>
             <a:ext cx="4114800" cy="347472"/>
           </a:xfrm>
           <a:prstGeom prst="rect">
@@ -5599,7 +5615,7 @@
         </p:nvSpPr>
         <p:spPr>
           <a:xfrm>
-            <a:off x="777240" y="4462272"/>
+            <a:off x="777240" y="4242816"/>
             <a:ext cx="3703320" cy="548640"/>
           </a:xfrm>
           <a:prstGeom prst="rect">
@@ -5638,7 +5654,7 @@
         </p:nvSpPr>
         <p:spPr>
           <a:xfrm>
-            <a:off x="777240" y="5212080"/>
+            <a:off x="777240" y="4901184"/>
             <a:ext cx="4160520" cy="365760"/>
           </a:xfrm>
           <a:prstGeom prst="rect">
@@ -5677,8 +5693,8 @@
         </p:nvSpPr>
         <p:spPr>
           <a:xfrm>
-            <a:off x="777240" y="5614416"/>
-            <a:ext cx="3703320" cy="1188720"/>
+            <a:off x="777240" y="5285232"/>
+            <a:ext cx="3703320" cy="868680"/>
           </a:xfrm>
           <a:prstGeom prst="rect">
             <a:avLst/>
@@ -6304,6 +6320,45 @@
                 <a:latin typeface="Arial"/>
               </a:rPr>
               <a:t>Software only</a:t>
+            </a:r>
+          </a:p>
+        </p:txBody>
+      </p:sp>
+      <p:sp>
+        <p:nvSpPr>
+          <p:cNvPr id="27" name="TextBox 26"/>
+          <p:cNvSpPr txBox="1"/>
+          <p:nvPr/>
+        </p:nvSpPr>
+        <p:spPr>
+          <a:xfrm>
+            <a:off x="777240" y="6327648"/>
+            <a:ext cx="10637215" cy="365760"/>
+          </a:xfrm>
+          <a:prstGeom prst="rect">
+            <a:avLst/>
+          </a:prstGeom>
+          <a:noFill/>
+        </p:spPr>
+        <p:txBody>
+          <a:bodyPr wrap="square" lIns="0" rIns="0" tIns="0" bIns="0">
+            <a:spAutoFit/>
+          </a:bodyPr>
+          <a:lstStyle/>
+          <a:p>
+            <a:pPr algn="l">
+              <a:lnSpc>
+                <a:spcPct val="120000"/>
+              </a:lnSpc>
+            </a:pPr>
+            <a:r>
+              <a:rPr sz="950" b="0">
+                <a:solidFill>
+                  <a:srgbClr val="76777D"/>
+                </a:solidFill>
+                <a:latin typeface="Arial"/>
+              </a:rPr>
+              <a:t>The $1,500 to $3,000 technician visit is our own estimate from conversations, not a published figure. Our pricing is intended, not yet tested on a buyer.</a:t>
             </a:r>
           </a:p>
         </p:txBody>
@@ -6360,7 +6415,23 @@
                 </a:solidFill>
                 <a:latin typeface="Georgia"/>
               </a:rPr>
-              <a:t>Raising [$150K] to put Kintrace on real arms and into three paid pilots.</a:t>
+              <a:t>Raising [$150K] to put Kintrace on real arms</a:t>
+            </a:r>
+          </a:p>
+          <a:p>
+            <a:pPr algn="l">
+              <a:lnSpc>
+                <a:spcPct val="116000"/>
+              </a:lnSpc>
+            </a:pPr>
+            <a:r>
+              <a:rPr sz="2900" b="0">
+                <a:solidFill>
+                  <a:srgbClr val="0C0C0E"/>
+                </a:solidFill>
+                <a:latin typeface="Georgia"/>
+              </a:rPr>
+              <a:t>and into three paid pilots.</a:t>
             </a:r>
           </a:p>
         </p:txBody>
@@ -8227,7 +8298,7 @@
         </p:nvSpPr>
         <p:spPr>
           <a:xfrm>
-            <a:off x="777240" y="6053328"/>
+            <a:off x="777240" y="6327648"/>
             <a:ext cx="10637215" cy="365760"/>
           </a:xfrm>
           <a:prstGeom prst="rect">
@@ -8310,7 +8381,23 @@
                 </a:solidFill>
                 <a:latin typeface="Georgia"/>
               </a:rPr>
-              <a:t>You pay for it twice: in ruined training data, and in stopped lines.</a:t>
+              <a:t>You pay for it twice: in ruined training data,</a:t>
+            </a:r>
+          </a:p>
+          <a:p>
+            <a:pPr algn="l">
+              <a:lnSpc>
+                <a:spcPct val="116000"/>
+              </a:lnSpc>
+            </a:pPr>
+            <a:r>
+              <a:rPr sz="2900" b="0">
+                <a:solidFill>
+                  <a:srgbClr val="0C0C0E"/>
+                </a:solidFill>
+                <a:latin typeface="Georgia"/>
+              </a:rPr>
+              <a:t>and in stopped lines.</a:t>
             </a:r>
           </a:p>
         </p:txBody>
@@ -8667,7 +8754,23 @@
                 </a:solidFill>
                 <a:latin typeface="Georgia"/>
               </a:rPr>
-              <a:t>Everything on the market tells you something is wrong, not what moved.</a:t>
+              <a:t>Everything on the market tells you something is wrong,</a:t>
+            </a:r>
+          </a:p>
+          <a:p>
+            <a:pPr algn="l">
+              <a:lnSpc>
+                <a:spcPct val="116000"/>
+              </a:lnSpc>
+            </a:pPr>
+            <a:r>
+              <a:rPr sz="2900" b="0">
+                <a:solidFill>
+                  <a:srgbClr val="0C0C0E"/>
+                </a:solidFill>
+                <a:latin typeface="Georgia"/>
+              </a:rPr>
+              <a:t>not what moved.</a:t>
             </a:r>
           </a:p>
         </p:txBody>
@@ -9234,6 +9337,45 @@
                 <a:latin typeface="Arial"/>
               </a:rPr>
               <a:t>We have not found anyone doing all of it from software alone: when it changed, what moved, by how much, and the fix written back.</a:t>
+            </a:r>
+          </a:p>
+        </p:txBody>
+      </p:sp>
+      <p:sp>
+        <p:nvSpPr>
+          <p:cNvPr id="17" name="TextBox 16"/>
+          <p:cNvSpPr txBox="1"/>
+          <p:nvPr/>
+        </p:nvSpPr>
+        <p:spPr>
+          <a:xfrm>
+            <a:off x="777240" y="6327648"/>
+            <a:ext cx="10637215" cy="365760"/>
+          </a:xfrm>
+          <a:prstGeom prst="rect">
+            <a:avLst/>
+          </a:prstGeom>
+          <a:noFill/>
+        </p:spPr>
+        <p:txBody>
+          <a:bodyPr wrap="square" lIns="0" rIns="0" tIns="0" bIns="0">
+            <a:spAutoFit/>
+          </a:bodyPr>
+          <a:lstStyle/>
+          <a:p>
+            <a:pPr algn="l">
+              <a:lnSpc>
+                <a:spcPct val="120000"/>
+              </a:lnSpc>
+            </a:pPr>
+            <a:r>
+              <a:rPr sz="950" b="0">
+                <a:solidFill>
+                  <a:srgbClr val="76777D"/>
+                </a:solidFill>
+                <a:latin typeface="Arial"/>
+              </a:rPr>
+              <a:t>What each of these does is taken from their own sites and materials. Listed in pitch/SOURCES.md.</a:t>
             </a:r>
           </a:p>
         </p:txBody>
@@ -9290,7 +9432,23 @@
                 </a:solidFill>
                 <a:latin typeface="Georgia"/>
               </a:rPr>
-              <a:t>Kintrace reads the robot's own logs, then says what moved and writes the fix.</a:t>
+              <a:t>Kintrace reads the robot's own logs, then says</a:t>
+            </a:r>
+          </a:p>
+          <a:p>
+            <a:pPr algn="l">
+              <a:lnSpc>
+                <a:spcPct val="116000"/>
+              </a:lnSpc>
+            </a:pPr>
+            <a:r>
+              <a:rPr sz="2900" b="0">
+                <a:solidFill>
+                  <a:srgbClr val="0C0C0E"/>
+                </a:solidFill>
+                <a:latin typeface="Georgia"/>
+              </a:rPr>
+              <a:t>what moved and writes the fix.</a:t>
             </a:r>
           </a:p>
         </p:txBody>
@@ -9693,7 +9851,7 @@
         </p:nvSpPr>
         <p:spPr>
           <a:xfrm>
-            <a:off x="777240" y="6016752"/>
+            <a:off x="777240" y="6327648"/>
             <a:ext cx="7863840" cy="365760"/>
           </a:xfrm>
           <a:prstGeom prst="rect">
@@ -9776,7 +9934,23 @@
                 </a:solidFill>
                 <a:latin typeface="Georgia"/>
               </a:rPr>
-              <a:t>In our simulator, Kintrace named the right cause every time. The dashboard baseline we wrote got 69%.</a:t>
+              <a:t>In our simulator, Kintrace named the right cause</a:t>
+            </a:r>
+          </a:p>
+          <a:p>
+            <a:pPr algn="l">
+              <a:lnSpc>
+                <a:spcPct val="116000"/>
+              </a:lnSpc>
+            </a:pPr>
+            <a:r>
+              <a:rPr sz="2900" b="0">
+                <a:solidFill>
+                  <a:srgbClr val="0C0C0E"/>
+                </a:solidFill>
+                <a:latin typeface="Georgia"/>
+              </a:rPr>
+              <a:t>every time. The dashboard baseline we wrote got 69%.</a:t>
             </a:r>
           </a:p>
         </p:txBody>
@@ -9896,7 +10070,23 @@
                 </a:solidFill>
                 <a:latin typeface="Georgia"/>
               </a:rPr>
-              <a:t>It also catches slow drift, about 55 seconds before the first grab misses.</a:t>
+              <a:t>It also catches slow drift, about 55 seconds</a:t>
+            </a:r>
+          </a:p>
+          <a:p>
+            <a:pPr algn="l">
+              <a:lnSpc>
+                <a:spcPct val="116000"/>
+              </a:lnSpc>
+            </a:pPr>
+            <a:r>
+              <a:rPr sz="2900" b="0">
+                <a:solidFill>
+                  <a:srgbClr val="0C0C0E"/>
+                </a:solidFill>
+                <a:latin typeface="Georgia"/>
+              </a:rPr>
+              <a:t>before the first grab misses.</a:t>
             </a:r>
           </a:p>
         </p:txBody>
@@ -10016,7 +10206,23 @@
                 </a:solidFill>
                 <a:latin typeface="Georgia"/>
               </a:rPr>
-              <a:t>There have never been more robots, and the money behind them doubled in three years.</a:t>
+              <a:t>There have never been more robots, and the money</a:t>
+            </a:r>
+          </a:p>
+          <a:p>
+            <a:pPr algn="l">
+              <a:lnSpc>
+                <a:spcPct val="116000"/>
+              </a:lnSpc>
+            </a:pPr>
+            <a:r>
+              <a:rPr sz="2900" b="0">
+                <a:solidFill>
+                  <a:srgbClr val="0C0C0E"/>
+                </a:solidFill>
+                <a:latin typeface="Georgia"/>
+              </a:rPr>
+              <a:t>behind them doubled in three years.</a:t>
             </a:r>
           </a:p>
         </p:txBody>
@@ -10380,7 +10586,23 @@
                 </a:solidFill>
                 <a:latin typeface="Georgia"/>
               </a:rPr>
-              <a:t>At $200 a robot a month, the part we can realistically sell to is $1.2B a year.</a:t>
+              <a:t>At $200 a robot a month, the part we can</a:t>
+            </a:r>
+          </a:p>
+          <a:p>
+            <a:pPr algn="l">
+              <a:lnSpc>
+                <a:spcPct val="116000"/>
+              </a:lnSpc>
+            </a:pPr>
+            <a:r>
+              <a:rPr sz="2900" b="0">
+                <a:solidFill>
+                  <a:srgbClr val="0C0C0E"/>
+                </a:solidFill>
+                <a:latin typeface="Georgia"/>
+              </a:rPr>
+              <a:t>realistically sell to is $1.2B a year.</a:t>
             </a:r>
           </a:p>
         </p:txBody>

--- a/pitch/Kintrace-deck.pptx
+++ b/pitch/Kintrace-deck.pptx
@@ -5543,7 +5543,7 @@
                 <a:solidFill>
                   <a:srgbClr val="121212"/>
                 </a:solidFill>
-                <a:latin typeface="Arial"/>
+                <a:latin typeface="Schibsted Grotesk"/>
               </a:rPr>
               <a:t>Kintrace</a:t>
             </a:r>
@@ -5582,7 +5582,7 @@
                 <a:solidFill>
                   <a:srgbClr val="55565B"/>
                 </a:solidFill>
-                <a:latin typeface="Arial"/>
+                <a:latin typeface="Schibsted Grotesk"/>
               </a:rPr>
               <a:t>Kintrace finds what moved on a robot, fixes it, and tells you it is good to go.</a:t>
             </a:r>
@@ -5685,11 +5685,11 @@
               </a:lnSpc>
             </a:pPr>
             <a:r>
-              <a:rPr sz="1300" b="1">
+              <a:rPr sz="1250" b="1">
                 <a:solidFill>
                   <a:srgbClr val="FFFFFF"/>
                 </a:solidFill>
-                <a:latin typeface="Arial"/>
+                <a:latin typeface="JetBrains Mono"/>
               </a:rPr>
               <a:t>camera moved 18.1 mm  ·  fixed</a:t>
             </a:r>
@@ -5772,7 +5772,7 @@
                 <a:solidFill>
                   <a:srgbClr val="121212"/>
                 </a:solidFill>
-                <a:latin typeface="Arial"/>
+                <a:latin typeface="Schibsted Grotesk"/>
               </a:rPr>
               <a:t>GO</a:t>
             </a:r>
@@ -5811,7 +5811,7 @@
                 <a:solidFill>
                   <a:srgbClr val="7A7B7F"/>
                 </a:solidFill>
-                <a:latin typeface="Arial"/>
+                <a:latin typeface="Schibsted Grotesk"/>
               </a:rPr>
               <a:t>The tool's own output, from a run on our simulator.</a:t>
             </a:r>
@@ -5897,7 +5897,7 @@
                 <a:solidFill>
                   <a:srgbClr val="121212"/>
                 </a:solidFill>
-                <a:latin typeface="Arial"/>
+                <a:latin typeface="Schibsted Grotesk"/>
               </a:rPr>
               <a:t>Rithik Satarla</a:t>
             </a:r>
@@ -5916,7 +5916,7 @@
                 <a:solidFill>
                   <a:srgbClr val="55565B"/>
                 </a:solidFill>
-                <a:latin typeface="Arial"/>
+                <a:latin typeface="Schibsted Grotesk"/>
               </a:rPr>
               <a:t>rithiksatarla@gmail.com</a:t>
             </a:r>
@@ -5932,7 +5932,7 @@
                 <a:solidFill>
                   <a:srgbClr val="7A7B7F"/>
                 </a:solidFill>
-                <a:latin typeface="Arial"/>
+                <a:latin typeface="Schibsted Grotesk"/>
               </a:rPr>
               <a:t>Previously LoopCell. Same product, new name.</a:t>
             </a:r>
@@ -5997,7 +5997,7 @@
                 <a:solidFill>
                   <a:srgbClr val="121212"/>
                 </a:solidFill>
-                <a:latin typeface="Arial"/>
+                <a:latin typeface="Schibsted Grotesk"/>
               </a:rPr>
               <a:t>At $200 a robot a month, the part we can</a:t>
             </a:r>
@@ -6013,7 +6013,7 @@
                 <a:solidFill>
                   <a:srgbClr val="121212"/>
                 </a:solidFill>
-                <a:latin typeface="Arial"/>
+                <a:latin typeface="Schibsted Grotesk"/>
               </a:rPr>
               <a:t>realistically sell to is $1.2B a year.</a:t>
             </a:r>
@@ -6120,7 +6120,7 @@
                 <a:solidFill>
                   <a:srgbClr val="121212"/>
                 </a:solidFill>
-                <a:latin typeface="Arial"/>
+                <a:latin typeface="Schibsted Grotesk"/>
               </a:rPr>
               <a:t>Top down check: $22.5B was spent on industrial robot services in 2023, heading to $41.6B by 2033. Our $12B bottom up number sits inside a services market already twice its size.</a:t>
             </a:r>
@@ -6159,7 +6159,7 @@
                 <a:solidFill>
                   <a:srgbClr val="7A7B7F"/>
                 </a:solidFill>
-                <a:latin typeface="Arial"/>
+                <a:latin typeface="Schibsted Grotesk"/>
               </a:rPr>
               <a:t>Robot count: IFR World Robotics 2026. Services market: Market.us, October 2024. The 10% camera share is our own estimate; we looked for a public figure and did not find one.</a:t>
             </a:r>
@@ -6224,7 +6224,7 @@
                 <a:solidFill>
                   <a:srgbClr val="121212"/>
                 </a:solidFill>
-                <a:latin typeface="Arial"/>
+                <a:latin typeface="Schibsted Grotesk"/>
               </a:rPr>
               <a:t>Software that names the cause and fixes it is an empty box.</a:t>
             </a:r>
@@ -6439,7 +6439,7 @@
                 <a:solidFill>
                   <a:srgbClr val="121212"/>
                 </a:solidFill>
-                <a:latin typeface="Arial"/>
+                <a:latin typeface="Schibsted Grotesk"/>
               </a:rPr>
               <a:t>Dynalog, CAPTRON</a:t>
             </a:r>
@@ -6478,7 +6478,7 @@
                 <a:solidFill>
                   <a:srgbClr val="55565B"/>
                 </a:solidFill>
-                <a:latin typeface="Arial"/>
+                <a:latin typeface="Schibsted Grotesk"/>
               </a:rPr>
               <a:t>Finds and fixes it, but you mount hardware in every cell.</a:t>
             </a:r>
@@ -6517,7 +6517,7 @@
                 <a:solidFill>
                   <a:srgbClr val="121212"/>
                 </a:solidFill>
-                <a:latin typeface="Arial"/>
+                <a:latin typeface="Schibsted Grotesk"/>
               </a:rPr>
               <a:t>Kintrace</a:t>
             </a:r>
@@ -6556,7 +6556,7 @@
                 <a:solidFill>
                   <a:srgbClr val="55565B"/>
                 </a:solidFill>
-                <a:latin typeface="Arial"/>
+                <a:latin typeface="Schibsted Grotesk"/>
               </a:rPr>
               <a:t>Finds it, sizes it, writes the fix, certifies the cell. Software only.</a:t>
             </a:r>
@@ -6595,7 +6595,7 @@
                 <a:solidFill>
                   <a:srgbClr val="121212"/>
                 </a:solidFill>
-                <a:latin typeface="Arial"/>
+                <a:latin typeface="Schibsted Grotesk"/>
               </a:rPr>
               <a:t>Robot makers</a:t>
             </a:r>
@@ -6634,7 +6634,7 @@
                 <a:solidFill>
                   <a:srgbClr val="55565B"/>
                 </a:solidFill>
-                <a:latin typeface="Arial"/>
+                <a:latin typeface="Schibsted Grotesk"/>
               </a:rPr>
               <a:t>Built-in mastering routines. One brand, run by a technician.</a:t>
             </a:r>
@@ -6673,7 +6673,7 @@
                 <a:solidFill>
                   <a:srgbClr val="121212"/>
                 </a:solidFill>
-                <a:latin typeface="Arial"/>
+                <a:latin typeface="Schibsted Grotesk"/>
               </a:rPr>
               <a:t>Ember, Foxglove, dataset checkers</a:t>
             </a:r>
@@ -6712,7 +6712,7 @@
                 <a:solidFill>
                   <a:srgbClr val="55565B"/>
                 </a:solidFill>
-                <a:latin typeface="Arial"/>
+                <a:latin typeface="Schibsted Grotesk"/>
               </a:rPr>
               <a:t>Show you something is off. No geometry, no fix.</a:t>
             </a:r>
@@ -6751,7 +6751,7 @@
                 <a:solidFill>
                   <a:srgbClr val="7A7B7F"/>
                 </a:solidFill>
-                <a:latin typeface="Arial"/>
+                <a:latin typeface="Schibsted Grotesk"/>
               </a:rPr>
               <a:t>Finds and fixes the cause</a:t>
             </a:r>
@@ -6790,7 +6790,7 @@
                 <a:solidFill>
                   <a:srgbClr val="7A7B7F"/>
                 </a:solidFill>
-                <a:latin typeface="Arial"/>
+                <a:latin typeface="Schibsted Grotesk"/>
               </a:rPr>
               <a:t>Only shows a problem</a:t>
             </a:r>
@@ -6829,7 +6829,7 @@
                 <a:solidFill>
                   <a:srgbClr val="7A7B7F"/>
                 </a:solidFill>
-                <a:latin typeface="Arial"/>
+                <a:latin typeface="Schibsted Grotesk"/>
               </a:rPr>
               <a:t>Needs hardware</a:t>
             </a:r>
@@ -6868,7 +6868,7 @@
                 <a:solidFill>
                   <a:srgbClr val="7A7B7F"/>
                 </a:solidFill>
-                <a:latin typeface="Arial"/>
+                <a:latin typeface="Schibsted Grotesk"/>
               </a:rPr>
               <a:t>Software only</a:t>
             </a:r>
@@ -6933,7 +6933,7 @@
                 <a:solidFill>
                   <a:srgbClr val="121212"/>
                 </a:solidFill>
-                <a:latin typeface="Arial"/>
+                <a:latin typeface="Schibsted Grotesk"/>
               </a:rPr>
               <a:t>Where we are going.</a:t>
             </a:r>
@@ -7062,7 +7062,7 @@
                 <a:solidFill>
                   <a:srgbClr val="121212"/>
                 </a:solidFill>
-                <a:latin typeface="Arial"/>
+                <a:latin typeface="Schibsted Grotesk"/>
               </a:rPr>
               <a:t>Now</a:t>
             </a:r>
@@ -7101,7 +7101,7 @@
                 <a:solidFill>
                   <a:srgbClr val="55565B"/>
                 </a:solidFill>
-                <a:latin typeface="Arial"/>
+                <a:latin typeface="Schibsted Grotesk"/>
               </a:rPr>
               <a:t>The engine works in simulation. A live demo anyone can try, and the code is open on GitHub.</a:t>
             </a:r>
@@ -7186,7 +7186,7 @@
                 <a:solidFill>
                   <a:srgbClr val="121212"/>
                 </a:solidFill>
-                <a:latin typeface="Arial"/>
+                <a:latin typeface="Schibsted Grotesk"/>
               </a:rPr>
               <a:t>3 months</a:t>
             </a:r>
@@ -7225,7 +7225,7 @@
                 <a:solidFill>
                   <a:srgbClr val="55565B"/>
                 </a:solidFill>
-                <a:latin typeface="Arial"/>
+                <a:latin typeface="Schibsted Grotesk"/>
               </a:rPr>
               <a:t>Kintrace running on a real robot arm, a video of it catching and fixing a bump, and first conversations with robot teams.</a:t>
             </a:r>
@@ -7310,7 +7310,7 @@
                 <a:solidFill>
                   <a:srgbClr val="121212"/>
                 </a:solidFill>
-                <a:latin typeface="Arial"/>
+                <a:latin typeface="Schibsted Grotesk"/>
               </a:rPr>
               <a:t>6 months</a:t>
             </a:r>
@@ -7349,7 +7349,7 @@
                 <a:solidFill>
                   <a:srgbClr val="55565B"/>
                 </a:solidFill>
-                <a:latin typeface="Arial"/>
+                <a:latin typeface="Schibsted Grotesk"/>
               </a:rPr>
               <a:t>Three paid pilots with robot learning teams and robot fleets, and real robot data plugged in through ROS 2 logs.</a:t>
             </a:r>
@@ -7434,7 +7434,7 @@
                 <a:solidFill>
                   <a:srgbClr val="121212"/>
                 </a:solidFill>
-                <a:latin typeface="Arial"/>
+                <a:latin typeface="Schibsted Grotesk"/>
               </a:rPr>
               <a:t>12 months</a:t>
             </a:r>
@@ -7473,7 +7473,7 @@
                 <a:solidFill>
                   <a:srgbClr val="55565B"/>
                 </a:solidFill>
-                <a:latin typeface="Arial"/>
+                <a:latin typeface="Schibsted Grotesk"/>
               </a:rPr>
               <a:t>Always-on monitoring for fleets, then working with robot makers to ship it on new arms.</a:t>
             </a:r>
@@ -7600,7 +7600,7 @@
                 <a:solidFill>
                   <a:srgbClr val="121212"/>
                 </a:solidFill>
-                <a:latin typeface="Arial"/>
+                <a:latin typeface="Schibsted Grotesk"/>
               </a:rPr>
               <a:t>Where this goes</a:t>
             </a:r>
@@ -7616,7 +7616,7 @@
                 <a:solidFill>
                   <a:srgbClr val="55565B"/>
                 </a:solidFill>
-                <a:latin typeface="Arial"/>
+                <a:latin typeface="Schibsted Grotesk"/>
               </a:rPr>
               <a:t>Every robot arm checked the way a car has a check engine light, with Kintrace as the standard way to know a robot is physically right.</a:t>
             </a:r>
@@ -7681,7 +7681,7 @@
                 <a:solidFill>
                   <a:srgbClr val="121212"/>
                 </a:solidFill>
-                <a:latin typeface="Arial"/>
+                <a:latin typeface="Schibsted Grotesk"/>
               </a:rPr>
               <a:t>Why back Kintrace now.</a:t>
             </a:r>
@@ -7764,7 +7764,7 @@
                 <a:solidFill>
                   <a:srgbClr val="121212"/>
                 </a:solidFill>
-                <a:latin typeface="Arial"/>
+                <a:latin typeface="Schibsted Grotesk"/>
               </a:rPr>
               <a:t>It is built, not an idea</a:t>
             </a:r>
@@ -7803,7 +7803,7 @@
                 <a:solidFill>
                   <a:srgbClr val="55565B"/>
                 </a:solidFill>
-                <a:latin typeface="Arial"/>
+                <a:latin typeface="Schibsted Grotesk"/>
               </a:rPr>
               <a:t>A working engine, a live demo, open code and 32 tests passing. You can run the whole thing yourself before you decide.</a:t>
             </a:r>
@@ -7886,7 +7886,7 @@
                 <a:solidFill>
                   <a:srgbClr val="121212"/>
                 </a:solidFill>
-                <a:latin typeface="Arial"/>
+                <a:latin typeface="Schibsted Grotesk"/>
               </a:rPr>
               <a:t>A hard technical edge</a:t>
             </a:r>
@@ -7925,7 +7925,7 @@
                 <a:solidFill>
                   <a:srgbClr val="55565B"/>
                 </a:solidFill>
-                <a:latin typeface="Arial"/>
+                <a:latin typeface="Schibsted Grotesk"/>
               </a:rPr>
               <a:t>It tells apart faults that look identical from outside, camera against joint against tool, and gives the exact fix. 120/120 against 83/120 for a dashboard baseline. That is research, not a feature someone adds in a week.</a:t>
             </a:r>
@@ -8008,7 +8008,7 @@
                 <a:solidFill>
                   <a:srgbClr val="121212"/>
                 </a:solidFill>
-                <a:latin typeface="Arial"/>
+                <a:latin typeface="Schibsted Grotesk"/>
               </a:rPr>
               <a:t>A big market with no software answer</a:t>
             </a:r>
@@ -8047,7 +8047,7 @@
                 <a:solidFill>
                   <a:srgbClr val="55565B"/>
                 </a:solidFill>
-                <a:latin typeface="Arial"/>
+                <a:latin typeface="Schibsted Grotesk"/>
               </a:rPr>
               <a:t>5 million robots, 600,000 added a year, robot learning booming. Today you get a dashboard that only flags a problem, or hardware in every cell.</a:t>
             </a:r>
@@ -8130,7 +8130,7 @@
                 <a:solidFill>
                   <a:srgbClr val="121212"/>
                 </a:solidFill>
-                <a:latin typeface="Arial"/>
+                <a:latin typeface="Schibsted Grotesk"/>
               </a:rPr>
               <a:t>The founder</a:t>
             </a:r>
@@ -8169,7 +8169,7 @@
                 <a:solidFill>
                   <a:srgbClr val="55565B"/>
                 </a:solidFill>
-                <a:latin typeface="Arial"/>
+                <a:latin typeface="Schibsted Grotesk"/>
               </a:rPr>
               <a:t>Physical AI research at CMU, Harvard Innovation Labs. I built all of this myself, from idea to working product in weeks.</a:t>
             </a:r>
@@ -8208,7 +8208,7 @@
                 <a:solidFill>
                   <a:srgbClr val="7A7B7F"/>
                 </a:solidFill>
-                <a:latin typeface="Arial"/>
+                <a:latin typeface="Schibsted Grotesk"/>
               </a:rPr>
               <a:t>The 120/120 and 83/120 are from our simulator, and we wrote the baseline. No customers, no pilots and no real-arm results yet. That is what this round is for.</a:t>
             </a:r>
@@ -8273,7 +8273,7 @@
                 <a:solidFill>
                   <a:srgbClr val="121212"/>
                 </a:solidFill>
-                <a:latin typeface="Arial"/>
+                <a:latin typeface="Schibsted Grotesk"/>
               </a:rPr>
               <a:t>$150K takes Kintrace from simulation to paying customers.</a:t>
             </a:r>
@@ -8380,7 +8380,7 @@
                 <a:solidFill>
                   <a:srgbClr val="7A7B7F"/>
                 </a:solidFill>
-                <a:latin typeface="Arial"/>
+                <a:latin typeface="Schibsted Grotesk"/>
               </a:rPr>
               <a:t>What it buys</a:t>
             </a:r>
@@ -8465,7 +8465,7 @@
                 <a:solidFill>
                   <a:srgbClr val="121212"/>
                 </a:solidFill>
-                <a:latin typeface="Arial"/>
+                <a:latin typeface="Schibsted Grotesk"/>
               </a:rPr>
               <a:t>3 months</a:t>
             </a:r>
@@ -8504,7 +8504,7 @@
                 <a:solidFill>
                   <a:srgbClr val="55565B"/>
                 </a:solidFill>
-                <a:latin typeface="Arial"/>
+                <a:latin typeface="Schibsted Grotesk"/>
               </a:rPr>
               <a:t>Kintrace on a real robot arm, a demo video, first user conversations</a:t>
             </a:r>
@@ -8589,7 +8589,7 @@
                 <a:solidFill>
                   <a:srgbClr val="121212"/>
                 </a:solidFill>
-                <a:latin typeface="Arial"/>
+                <a:latin typeface="Schibsted Grotesk"/>
               </a:rPr>
               <a:t>6 months</a:t>
             </a:r>
@@ -8628,7 +8628,7 @@
                 <a:solidFill>
                   <a:srgbClr val="55565B"/>
                 </a:solidFill>
-                <a:latin typeface="Arial"/>
+                <a:latin typeface="Schibsted Grotesk"/>
               </a:rPr>
               <a:t>Three paying pilots</a:t>
             </a:r>
@@ -8713,7 +8713,7 @@
                 <a:solidFill>
                   <a:srgbClr val="121212"/>
                 </a:solidFill>
-                <a:latin typeface="Arial"/>
+                <a:latin typeface="Schibsted Grotesk"/>
               </a:rPr>
               <a:t>12 months</a:t>
             </a:r>
@@ -8752,7 +8752,7 @@
                 <a:solidFill>
                   <a:srgbClr val="55565B"/>
                 </a:solidFill>
-                <a:latin typeface="Arial"/>
+                <a:latin typeface="Schibsted Grotesk"/>
               </a:rPr>
               <a:t>Results from real customers, ready for a seed round</a:t>
             </a:r>
@@ -8835,7 +8835,7 @@
                 <a:solidFill>
                   <a:srgbClr val="121212"/>
                 </a:solidFill>
-                <a:latin typeface="Arial"/>
+                <a:latin typeface="Schibsted Grotesk"/>
               </a:rPr>
               <a:t>Rithik Satarla</a:t>
             </a:r>
@@ -8851,7 +8851,7 @@
                 <a:solidFill>
                   <a:srgbClr val="55565B"/>
                 </a:solidFill>
-                <a:latin typeface="Arial"/>
+                <a:latin typeface="Schibsted Grotesk"/>
               </a:rPr>
               <a:t>Physical AI research at CMU. Harvard Innovation Labs. rithiksatarla@gmail.com</a:t>
             </a:r>
@@ -8890,7 +8890,7 @@
                 <a:solidFill>
                   <a:srgbClr val="55565B"/>
                 </a:solidFill>
-                <a:latin typeface="Arial"/>
+                <a:latin typeface="Schibsted Grotesk"/>
               </a:rPr>
               <a:t>Try it: the browser demo</a:t>
             </a:r>
@@ -8906,7 +8906,7 @@
                 <a:solidFill>
                   <a:srgbClr val="55565B"/>
                 </a:solidFill>
-                <a:latin typeface="Arial"/>
+                <a:latin typeface="Schibsted Grotesk"/>
               </a:rPr>
               <a:t>github.com/RithikSatarla/kintrace</a:t>
             </a:r>
@@ -8971,7 +8971,7 @@
                 <a:solidFill>
                   <a:srgbClr val="121212"/>
                 </a:solidFill>
-                <a:latin typeface="Arial"/>
+                <a:latin typeface="Schibsted Grotesk"/>
               </a:rPr>
               <a:t>Kintrace finds what moved on a robot, fixes it,</a:t>
             </a:r>
@@ -8987,7 +8987,7 @@
                 <a:solidFill>
                   <a:srgbClr val="121212"/>
                 </a:solidFill>
-                <a:latin typeface="Arial"/>
+                <a:latin typeface="Schibsted Grotesk"/>
               </a:rPr>
               <a:t>and tells you it is good to go.</a:t>
             </a:r>
@@ -9066,11 +9066,11 @@
               </a:lnSpc>
             </a:pPr>
             <a:r>
-              <a:rPr sz="2600" b="1">
+              <a:rPr sz="2400" b="1">
                 <a:solidFill>
                   <a:srgbClr val="121212"/>
                 </a:solidFill>
-                <a:latin typeface="Arial"/>
+                <a:latin typeface="JetBrains Mono"/>
               </a:rPr>
               <a:t>13:40:23</a:t>
             </a:r>
@@ -9109,7 +9109,7 @@
                 <a:solidFill>
                   <a:srgbClr val="55565B"/>
                 </a:solidFill>
-                <a:latin typeface="Arial"/>
+                <a:latin typeface="Schibsted Grotesk"/>
               </a:rPr>
               <a:t>something changed</a:t>
             </a:r>
@@ -9192,7 +9192,7 @@
                 <a:solidFill>
                   <a:srgbClr val="121212"/>
                 </a:solidFill>
-                <a:latin typeface="Arial"/>
+                <a:latin typeface="Schibsted Grotesk"/>
               </a:rPr>
               <a:t>Notices</a:t>
             </a:r>
@@ -9231,7 +9231,7 @@
                 <a:solidFill>
                   <a:srgbClr val="55565B"/>
                 </a:solidFill>
-                <a:latin typeface="Arial"/>
+                <a:latin typeface="Schibsted Grotesk"/>
               </a:rPr>
               <a:t>It sees the exact moment a robot got knocked out of place, from data the robot already records.</a:t>
             </a:r>
@@ -9310,11 +9310,11 @@
               </a:lnSpc>
             </a:pPr>
             <a:r>
-              <a:rPr sz="2600" b="1">
+              <a:rPr sz="2400" b="1">
                 <a:solidFill>
                   <a:srgbClr val="121212"/>
                 </a:solidFill>
-                <a:latin typeface="Arial"/>
+                <a:latin typeface="JetBrains Mono"/>
               </a:rPr>
               <a:t>18.1 mm</a:t>
             </a:r>
@@ -9353,7 +9353,7 @@
                 <a:solidFill>
                   <a:srgbClr val="55565B"/>
                 </a:solidFill>
-                <a:latin typeface="Arial"/>
+                <a:latin typeface="Schibsted Grotesk"/>
               </a:rPr>
               <a:t>the camera moved</a:t>
             </a:r>
@@ -9436,7 +9436,7 @@
                 <a:solidFill>
                   <a:srgbClr val="121212"/>
                 </a:solidFill>
-                <a:latin typeface="Arial"/>
+                <a:latin typeface="Schibsted Grotesk"/>
               </a:rPr>
               <a:t>Explains</a:t>
             </a:r>
@@ -9475,7 +9475,7 @@
                 <a:solidFill>
                   <a:srgbClr val="55565B"/>
                 </a:solidFill>
-                <a:latin typeface="Arial"/>
+                <a:latin typeface="Schibsted Grotesk"/>
               </a:rPr>
               <a:t>It says what moved and by how much. Not an alert. A measurement.</a:t>
             </a:r>
@@ -9554,11 +9554,11 @@
               </a:lnSpc>
             </a:pPr>
             <a:r>
-              <a:rPr sz="2600" b="1">
+              <a:rPr sz="2400" b="1">
                 <a:solidFill>
                   <a:srgbClr val="121212"/>
                 </a:solidFill>
-                <a:latin typeface="Arial"/>
+                <a:latin typeface="JetBrains Mono"/>
               </a:rPr>
               <a:t>6 / 6</a:t>
             </a:r>
@@ -9597,7 +9597,7 @@
                 <a:solidFill>
                   <a:srgbClr val="55565B"/>
                 </a:solidFill>
-                <a:latin typeface="Arial"/>
+                <a:latin typeface="Schibsted Grotesk"/>
               </a:rPr>
               <a:t>test grabs, then GO</a:t>
             </a:r>
@@ -9680,7 +9680,7 @@
                 <a:solidFill>
                   <a:srgbClr val="121212"/>
                 </a:solidFill>
-                <a:latin typeface="Arial"/>
+                <a:latin typeface="Schibsted Grotesk"/>
               </a:rPr>
               <a:t>Fixes</a:t>
             </a:r>
@@ -9719,7 +9719,7 @@
                 <a:solidFill>
                   <a:srgbClr val="55565B"/>
                 </a:solidFill>
-                <a:latin typeface="Arial"/>
+                <a:latin typeface="Schibsted Grotesk"/>
               </a:rPr>
               <a:t>It updates the robot, runs test grabs, and says whether the cell is good to go.</a:t>
             </a:r>
@@ -9802,7 +9802,7 @@
                 <a:solidFill>
                   <a:srgbClr val="121212"/>
                 </a:solidFill>
-                <a:latin typeface="Arial"/>
+                <a:latin typeface="Schibsted Grotesk"/>
               </a:rPr>
               <a:t>Software only. No new hardware. It works on robot arms that already have a camera.</a:t>
             </a:r>
@@ -9867,7 +9867,7 @@
                 <a:solidFill>
                   <a:srgbClr val="121212"/>
                 </a:solidFill>
-                <a:latin typeface="Arial"/>
+                <a:latin typeface="Schibsted Grotesk"/>
               </a:rPr>
               <a:t>At 1:40 a cart clips a camera. Nobody finds out until 2:10.</a:t>
             </a:r>
@@ -9974,7 +9974,7 @@
                 <a:solidFill>
                   <a:srgbClr val="55565B"/>
                 </a:solidFill>
-                <a:latin typeface="Arial"/>
+                <a:latin typeface="Schibsted Grotesk"/>
               </a:rPr>
               <a:t>1:40</a:t>
             </a:r>
@@ -10013,7 +10013,7 @@
                 <a:solidFill>
                   <a:srgbClr val="121212"/>
                 </a:solidFill>
-                <a:latin typeface="Arial"/>
+                <a:latin typeface="Schibsted Grotesk"/>
               </a:rPr>
               <a:t>Running fine</a:t>
             </a:r>
@@ -10052,7 +10052,7 @@
                 <a:solidFill>
                   <a:srgbClr val="55565B"/>
                 </a:solidFill>
-                <a:latin typeface="Arial"/>
+                <a:latin typeface="Schibsted Grotesk"/>
               </a:rPr>
               <a:t>The camera is where the calibration says it is.</a:t>
             </a:r>
@@ -10159,7 +10159,7 @@
                 <a:solidFill>
                   <a:srgbClr val="55565B"/>
                 </a:solidFill>
-                <a:latin typeface="Arial"/>
+                <a:latin typeface="Schibsted Grotesk"/>
               </a:rPr>
               <a:t>1:40 to 2:10</a:t>
             </a:r>
@@ -10198,7 +10198,7 @@
                 <a:solidFill>
                   <a:srgbClr val="121212"/>
                 </a:solidFill>
-                <a:latin typeface="Arial"/>
+                <a:latin typeface="Schibsted Grotesk"/>
               </a:rPr>
               <a:t>Bumped, and nobody knows</a:t>
             </a:r>
@@ -10237,7 +10237,7 @@
                 <a:solidFill>
                   <a:srgbClr val="55565B"/>
                 </a:solidFill>
-                <a:latin typeface="Arial"/>
+                <a:latin typeface="Schibsted Grotesk"/>
               </a:rPr>
               <a:t>Every grab is a centimetre off. The robot still reports healthy.</a:t>
             </a:r>
@@ -10344,7 +10344,7 @@
                 <a:solidFill>
                   <a:srgbClr val="55565B"/>
                 </a:solidFill>
-                <a:latin typeface="Arial"/>
+                <a:latin typeface="Schibsted Grotesk"/>
               </a:rPr>
               <a:t>1:43 with Kintrace</a:t>
             </a:r>
@@ -10383,7 +10383,7 @@
                 <a:solidFill>
                   <a:srgbClr val="121212"/>
                 </a:solidFill>
-                <a:latin typeface="Arial"/>
+                <a:latin typeface="Schibsted Grotesk"/>
               </a:rPr>
               <a:t>Found, fixed, signed off</a:t>
             </a:r>
@@ -10422,7 +10422,7 @@
                 <a:solidFill>
                   <a:srgbClr val="55565B"/>
                 </a:solidFill>
-                <a:latin typeface="Arial"/>
+                <a:latin typeface="Schibsted Grotesk"/>
               </a:rPr>
               <a:t>Camera moved 18.1 mm. New calibration written. Six test grabs.</a:t>
             </a:r>
@@ -10461,7 +10461,7 @@
                 <a:solidFill>
                   <a:srgbClr val="7A7B7F"/>
                 </a:solidFill>
-                <a:latin typeface="Arial"/>
+                <a:latin typeface="Schibsted Grotesk"/>
               </a:rPr>
               <a:t>An illustration, drawn from a run on our simulator. The 18.1 mm and the timings are printed by the tool. No cell like this exists yet.</a:t>
             </a:r>
@@ -10526,7 +10526,7 @@
                 <a:solidFill>
                   <a:srgbClr val="121212"/>
                 </a:solidFill>
-                <a:latin typeface="Arial"/>
+                <a:latin typeface="Schibsted Grotesk"/>
               </a:rPr>
               <a:t>You pay for it twice: in ruined training data,</a:t>
             </a:r>
@@ -10542,7 +10542,7 @@
                 <a:solidFill>
                   <a:srgbClr val="121212"/>
                 </a:solidFill>
-                <a:latin typeface="Arial"/>
+                <a:latin typeface="Schibsted Grotesk"/>
               </a:rPr>
               <a:t>and in stopped lines.</a:t>
             </a:r>
@@ -10605,7 +10605,7 @@
                 <a:solidFill>
                   <a:srgbClr val="121212"/>
                 </a:solidFill>
-                <a:latin typeface="Arial"/>
+                <a:latin typeface="Schibsted Grotesk"/>
               </a:rPr>
               <a:t>Robot training data</a:t>
             </a:r>
@@ -10621,7 +10621,7 @@
                 <a:solidFill>
                   <a:srgbClr val="55565B"/>
                 </a:solidFill>
-                <a:latin typeface="Arial"/>
+                <a:latin typeface="Schibsted Grotesk"/>
               </a:rPr>
               <a:t>An open audit of 4,959 recorded episodes flagged 15.6% of them for exclusion, and another half for review.</a:t>
             </a:r>
@@ -10704,7 +10704,7 @@
                 <a:solidFill>
                   <a:srgbClr val="121212"/>
                 </a:solidFill>
-                <a:latin typeface="Arial"/>
+                <a:latin typeface="Schibsted Grotesk"/>
               </a:rPr>
               <a:t>$2.3M</a:t>
             </a:r>
@@ -10743,7 +10743,7 @@
                 <a:solidFill>
                   <a:srgbClr val="121212"/>
                 </a:solidFill>
-                <a:latin typeface="Arial"/>
+                <a:latin typeface="Schibsted Grotesk"/>
               </a:rPr>
               <a:t>an hour</a:t>
             </a:r>
@@ -10759,7 +10759,7 @@
                 <a:solidFill>
                   <a:srgbClr val="55565B"/>
                 </a:solidFill>
-                <a:latin typeface="Arial"/>
+                <a:latin typeface="Schibsted Grotesk"/>
               </a:rPr>
               <a:t>Up to, for an idle production line at a big car plant. Across the 500 largest manufacturers, unplanned downtime of every kind costs $1.4 trillion a year, about 11% of revenue.</a:t>
             </a:r>
@@ -10798,7 +10798,7 @@
                 <a:solidFill>
                   <a:srgbClr val="7A7B7F"/>
                 </a:solidFill>
-                <a:latin typeface="Arial"/>
+                <a:latin typeface="Schibsted Grotesk"/>
               </a:rPr>
               <a:t>Episode audit: an open source tool run over 12 public datasets, dev.to, 2026. Downtime: Siemens, The True Cost of Downtime 2024. Both linked in pitch/SOURCES.md.</a:t>
             </a:r>
@@ -10863,7 +10863,7 @@
                 <a:solidFill>
                   <a:srgbClr val="121212"/>
                 </a:solidFill>
-                <a:latin typeface="Arial"/>
+                <a:latin typeface="Schibsted Grotesk"/>
               </a:rPr>
               <a:t>Everything on the market tells you something is wrong,</a:t>
             </a:r>
@@ -10879,7 +10879,7 @@
                 <a:solidFill>
                   <a:srgbClr val="121212"/>
                 </a:solidFill>
-                <a:latin typeface="Arial"/>
+                <a:latin typeface="Schibsted Grotesk"/>
               </a:rPr>
               <a:t>not what moved.</a:t>
             </a:r>
@@ -10962,7 +10962,7 @@
                 <a:solidFill>
                   <a:srgbClr val="121212"/>
                 </a:solidFill>
-                <a:latin typeface="Arial"/>
+                <a:latin typeface="Schibsted Grotesk"/>
               </a:rPr>
               <a:t>Monitoring dashboards</a:t>
             </a:r>
@@ -11001,7 +11001,7 @@
                 <a:solidFill>
                   <a:srgbClr val="7A7B7F"/>
                 </a:solidFill>
-                <a:latin typeface="Arial"/>
+                <a:latin typeface="Schibsted Grotesk"/>
               </a:rPr>
               <a:t>Ember, Foxglove, Formant</a:t>
             </a:r>
@@ -11040,7 +11040,7 @@
                 <a:solidFill>
                   <a:srgbClr val="55565B"/>
                 </a:solidFill>
-                <a:latin typeface="Arial"/>
+                <a:latin typeface="Schibsted Grotesk"/>
               </a:rPr>
               <a:t>They watch the software and the logs. They will tell you a cell is slow or a run failed. They do not measure where the camera is, so they cannot name the physical cause.</a:t>
             </a:r>
@@ -11123,7 +11123,7 @@
                 <a:solidFill>
                   <a:srgbClr val="121212"/>
                 </a:solidFill>
-                <a:latin typeface="Arial"/>
+                <a:latin typeface="Schibsted Grotesk"/>
               </a:rPr>
               <a:t>Calibration hardware</a:t>
             </a:r>
@@ -11162,7 +11162,7 @@
                 <a:solidFill>
                   <a:srgbClr val="7A7B7F"/>
                 </a:solidFill>
-                <a:latin typeface="Arial"/>
+                <a:latin typeface="Schibsted Grotesk"/>
               </a:rPr>
               <a:t>Dynalog, CAPTRON, Renishaw</a:t>
             </a:r>
@@ -11201,7 +11201,7 @@
                 <a:solidFill>
                   <a:srgbClr val="55565B"/>
                 </a:solidFill>
-                <a:latin typeface="Arial"/>
+                <a:latin typeface="Schibsted Grotesk"/>
               </a:rPr>
               <a:t>These do measure, and they are accurate. But you bolt a device into every cell you want covered, and each one mostly does the tool.</a:t>
             </a:r>
@@ -11284,7 +11284,7 @@
                 <a:solidFill>
                   <a:srgbClr val="121212"/>
                 </a:solidFill>
-                <a:latin typeface="Arial"/>
+                <a:latin typeface="Schibsted Grotesk"/>
               </a:rPr>
               <a:t>A technician</a:t>
             </a:r>
@@ -11323,7 +11323,7 @@
                 <a:solidFill>
                   <a:srgbClr val="7A7B7F"/>
                 </a:solidFill>
-                <a:latin typeface="Arial"/>
+                <a:latin typeface="Schibsted Grotesk"/>
               </a:rPr>
               <a:t>How it is actually done</a:t>
             </a:r>
@@ -11362,7 +11362,7 @@
                 <a:solidFill>
                   <a:srgbClr val="55565B"/>
                 </a:solidFill>
-                <a:latin typeface="Arial"/>
+                <a:latin typeface="Schibsted Grotesk"/>
               </a:rPr>
               <a:t>Someone drives out and rules out each cause by hand, one at a time, with the cell down while they do it. It works. It costs hours.</a:t>
             </a:r>
@@ -11445,7 +11445,7 @@
                 <a:solidFill>
                   <a:srgbClr val="121212"/>
                 </a:solidFill>
-                <a:latin typeface="Arial"/>
+                <a:latin typeface="Schibsted Grotesk"/>
               </a:rPr>
               <a:t>We have not found anyone doing all of it from software alone: when it changed, what moved, by how much, and the fix written back.</a:t>
             </a:r>
@@ -11484,7 +11484,7 @@
                 <a:solidFill>
                   <a:srgbClr val="7A7B7F"/>
                 </a:solidFill>
-                <a:latin typeface="Arial"/>
+                <a:latin typeface="Schibsted Grotesk"/>
               </a:rPr>
               <a:t>What each of these does is taken from their own sites and materials. Listed in pitch/SOURCES.md.</a:t>
             </a:r>
@@ -11549,7 +11549,7 @@
                 <a:solidFill>
                   <a:srgbClr val="121212"/>
                 </a:solidFill>
-                <a:latin typeface="Arial"/>
+                <a:latin typeface="Schibsted Grotesk"/>
               </a:rPr>
               <a:t>This is the tool's own output, not a mockup.</a:t>
             </a:r>
@@ -11658,7 +11658,7 @@
                 <a:solidFill>
                   <a:srgbClr val="121212"/>
                 </a:solidFill>
-                <a:latin typeface="Arial"/>
+                <a:latin typeface="Schibsted Grotesk"/>
               </a:rPr>
               <a:t>1</a:t>
             </a:r>
@@ -11697,7 +11697,7 @@
                 <a:solidFill>
                   <a:srgbClr val="121212"/>
                 </a:solidFill>
-                <a:latin typeface="Arial"/>
+                <a:latin typeface="Schibsted Grotesk"/>
               </a:rPr>
               <a:t>Notices</a:t>
             </a:r>
@@ -11736,7 +11736,7 @@
                 <a:solidFill>
                   <a:srgbClr val="55565B"/>
                 </a:solidFill>
-                <a:latin typeface="Arial"/>
+                <a:latin typeface="Schibsted Grotesk"/>
               </a:rPr>
               <a:t>Finds the moment things changed and lines it up with the protective stop the controller logged.</a:t>
             </a:r>
@@ -11821,7 +11821,7 @@
                 <a:solidFill>
                   <a:srgbClr val="121212"/>
                 </a:solidFill>
-                <a:latin typeface="Arial"/>
+                <a:latin typeface="Schibsted Grotesk"/>
               </a:rPr>
               <a:t>2</a:t>
             </a:r>
@@ -11860,7 +11860,7 @@
                 <a:solidFill>
                   <a:srgbClr val="121212"/>
                 </a:solidFill>
-                <a:latin typeface="Arial"/>
+                <a:latin typeface="Schibsted Grotesk"/>
               </a:rPr>
               <a:t>Explains</a:t>
             </a:r>
@@ -11899,7 +11899,7 @@
                 <a:solidFill>
                   <a:srgbClr val="55565B"/>
                 </a:solidFill>
-                <a:latin typeface="Arial"/>
+                <a:latin typeface="Schibsted Grotesk"/>
               </a:rPr>
               <a:t>Names the cause and sizes it. Here: the camera, 18.1 mm, and nothing else moved.</a:t>
             </a:r>
@@ -11984,7 +11984,7 @@
                 <a:solidFill>
                   <a:srgbClr val="121212"/>
                 </a:solidFill>
-                <a:latin typeface="Arial"/>
+                <a:latin typeface="Schibsted Grotesk"/>
               </a:rPr>
               <a:t>3</a:t>
             </a:r>
@@ -12023,7 +12023,7 @@
                 <a:solidFill>
                   <a:srgbClr val="121212"/>
                 </a:solidFill>
-                <a:latin typeface="Arial"/>
+                <a:latin typeface="Schibsted Grotesk"/>
               </a:rPr>
               <a:t>Fixes</a:t>
             </a:r>
@@ -12062,7 +12062,7 @@
                 <a:solidFill>
                   <a:srgbClr val="55565B"/>
                 </a:solidFill>
-                <a:latin typeface="Arial"/>
+                <a:latin typeface="Schibsted Grotesk"/>
               </a:rPr>
               <a:t>Writes the new calibration, re-checks, runs six test grabs, then signs GO or NO-GO.</a:t>
             </a:r>
@@ -12101,7 +12101,7 @@
                 <a:solidFill>
                   <a:srgbClr val="7A7B7F"/>
                 </a:solidFill>
-                <a:latin typeface="Arial"/>
+                <a:latin typeface="Schibsted Grotesk"/>
               </a:rPr>
               <a:t>A real run of the tool on our simulated cell. You can run it yourself at the demo link on the last slide.</a:t>
             </a:r>
@@ -12166,7 +12166,7 @@
                 <a:solidFill>
                   <a:srgbClr val="121212"/>
                 </a:solidFill>
-                <a:latin typeface="Arial"/>
+                <a:latin typeface="Schibsted Grotesk"/>
               </a:rPr>
               <a:t>In our simulator, Kintrace named the right cause</a:t>
             </a:r>
@@ -12182,7 +12182,7 @@
                 <a:solidFill>
                   <a:srgbClr val="121212"/>
                 </a:solidFill>
-                <a:latin typeface="Arial"/>
+                <a:latin typeface="Schibsted Grotesk"/>
               </a:rPr>
               <a:t>every time. The dashboard baseline we wrote got 69%.</a:t>
             </a:r>
@@ -12245,7 +12245,7 @@
                 <a:solidFill>
                   <a:srgbClr val="7A7B7F"/>
                 </a:solidFill>
-                <a:latin typeface="Arial"/>
+                <a:latin typeface="Schibsted Grotesk"/>
               </a:rPr>
               <a:t>120 runs on our simulated UR5e pick cell, 20 per case, every fault sized to cause the same 20 mm miss. The baseline is ours, built from the signals a typical dashboard tracks. Never run on a real arm.</a:t>
             </a:r>
@@ -12310,7 +12310,7 @@
                 <a:solidFill>
                   <a:srgbClr val="121212"/>
                 </a:solidFill>
-                <a:latin typeface="Arial"/>
+                <a:latin typeface="Schibsted Grotesk"/>
               </a:rPr>
               <a:t>It also catches slow drift, about 55 seconds</a:t>
             </a:r>
@@ -12326,7 +12326,7 @@
                 <a:solidFill>
                   <a:srgbClr val="121212"/>
                 </a:solidFill>
-                <a:latin typeface="Arial"/>
+                <a:latin typeface="Schibsted Grotesk"/>
               </a:rPr>
               <a:t>before the first grab misses.</a:t>
             </a:r>
@@ -12389,7 +12389,7 @@
                 <a:solidFill>
                   <a:srgbClr val="7A7B7F"/>
                 </a:solidFill>
-                <a:latin typeface="Arial"/>
+                <a:latin typeface="Schibsted Grotesk"/>
               </a:rPr>
               <a:t>One simulated run of a sagging camera mount. Across 20 drifts it warned before the first miss 19 times, named the cause right 20 times, and raised 0 false alarms in 230 healthy windows. Drift is sped up so a run takes minutes. We have not measured lead time at real-world drift rates.</a:t>
             </a:r>
@@ -12454,7 +12454,7 @@
                 <a:solidFill>
                   <a:srgbClr val="121212"/>
                 </a:solidFill>
-                <a:latin typeface="Arial"/>
+                <a:latin typeface="Schibsted Grotesk"/>
               </a:rPr>
               <a:t>There have never been more robots, and the money</a:t>
             </a:r>
@@ -12470,7 +12470,7 @@
                 <a:solidFill>
                   <a:srgbClr val="121212"/>
                 </a:solidFill>
-                <a:latin typeface="Arial"/>
+                <a:latin typeface="Schibsted Grotesk"/>
               </a:rPr>
               <a:t>behind them doubled in three years.</a:t>
             </a:r>
@@ -12577,7 +12577,7 @@
                 <a:solidFill>
                   <a:srgbClr val="121212"/>
                 </a:solidFill>
-                <a:latin typeface="Arial"/>
+                <a:latin typeface="Schibsted Grotesk"/>
               </a:rPr>
               <a:t>5 million</a:t>
             </a:r>
@@ -12616,7 +12616,7 @@
                 <a:solidFill>
                   <a:srgbClr val="55565B"/>
                 </a:solidFill>
-                <a:latin typeface="Arial"/>
+                <a:latin typeface="Schibsted Grotesk"/>
               </a:rPr>
               <a:t>industrial robots now operating, a record, up 9% in a year. The US installed 38,500 and passed Japan. IFR, September 2026.</a:t>
             </a:r>
@@ -12699,7 +12699,7 @@
                 <a:solidFill>
                   <a:srgbClr val="121212"/>
                 </a:solidFill>
-                <a:latin typeface="Arial"/>
+                <a:latin typeface="Schibsted Grotesk"/>
               </a:rPr>
               <a:t>47% a year</a:t>
             </a:r>
@@ -12738,7 +12738,7 @@
                 <a:solidFill>
                   <a:srgbClr val="55565B"/>
                 </a:solidFill>
-                <a:latin typeface="Arial"/>
+                <a:latin typeface="Schibsted Grotesk"/>
               </a:rPr>
               <a:t>forecast growth for physical AI, from $0.89B in 2025 to $15.2B by 2032. Every robot in it learns from recordings.</a:t>
             </a:r>
@@ -12777,7 +12777,7 @@
                 <a:solidFill>
                   <a:srgbClr val="7A7B7F"/>
                 </a:solidFill>
-                <a:latin typeface="Arial"/>
+                <a:latin typeface="Schibsted Grotesk"/>
               </a:rPr>
               <a:t>IFR World Robotics 2026. MarketsandMarkets, physical AI. Venture figures from Robotics Center, State of Robotics 2026. Links in pitch/SOURCES.md.</a:t>
             </a:r>
